--- a/docs/VelesHack_HyperionSentinel_Submission.pptx
+++ b/docs/VelesHack_HyperionSentinel_Submission.pptx
@@ -5574,7 +5574,7 @@
               <a:rPr lang="en">
                 <a:hlinkClick r:id="rId21"/>
               </a:rPr>
-              <a:t>https://youtu.be/7AZYCdE_vZU</a:t>
+              <a:t>https://youtu.be/ZP7SHtDgncU</a:t>
             </a:r>
             <a:endParaRPr/>
           </a:p>
